--- a/assets/ppts/M2.1.1_Transport_Layer_Services.pptx
+++ b/assets/ppts/M2.1.1_Transport_Layer_Services.pptx
@@ -8,6 +8,7 @@
     <p:sldId id="256" r:id="rId7"/>
     <p:sldId id="257" r:id="rId8"/>
     <p:sldId id="258" r:id="rId9"/>
+    <p:sldId id="259" r:id="rId10"/>
   </p:sldIdLst>
   <p:sldSz cx="12191695" cy="6858000" type="screen4x3"/>
   <p:notesSz cx="6858000" cy="9144000"/>
@@ -3141,8 +3142,8 @@
         </p:nvSpPr>
         <p:spPr>
           <a:xfrm>
-            <a:off x="822960" y="1188720"/>
-            <a:ext cx="164592" cy="4480560"/>
+            <a:off x="0" y="0"/>
+            <a:ext cx="12191695" cy="137160"/>
           </a:xfrm>
           <a:prstGeom prst="rect">
             <a:avLst/>
@@ -3178,14 +3179,57 @@
       </p:sp>
       <p:sp>
         <p:nvSpPr>
-          <p:cNvPr id="4" name="TextBox 3"/>
+          <p:cNvPr id="4" name="Rectangle 3"/>
+          <p:cNvSpPr/>
+          <p:nvPr/>
+        </p:nvSpPr>
+        <p:spPr>
+          <a:xfrm>
+            <a:off x="822960" y="1097280"/>
+            <a:ext cx="164592" cy="4663440"/>
+          </a:xfrm>
+          <a:prstGeom prst="rect">
+            <a:avLst/>
+          </a:prstGeom>
+          <a:solidFill>
+            <a:srgbClr val="D97706"/>
+          </a:solidFill>
+          <a:ln>
+            <a:noFill/>
+          </a:ln>
+        </p:spPr>
+        <p:style>
+          <a:lnRef idx="1">
+            <a:schemeClr val="accent1"/>
+          </a:lnRef>
+          <a:fillRef idx="3">
+            <a:schemeClr val="accent1"/>
+          </a:fillRef>
+          <a:effectRef idx="2">
+            <a:schemeClr val="accent1"/>
+          </a:effectRef>
+          <a:fontRef idx="minor">
+            <a:schemeClr val="lt1"/>
+          </a:fontRef>
+        </p:style>
+        <p:txBody>
+          <a:bodyPr rtlCol="0" anchor="ctr"/>
+          <a:lstStyle/>
+          <a:p>
+            <a:pPr algn="ctr"/>
+          </a:p>
+        </p:txBody>
+      </p:sp>
+      <p:sp>
+        <p:nvSpPr>
+          <p:cNvPr id="5" name="TextBox 4"/>
           <p:cNvSpPr txBox="1"/>
           <p:nvPr/>
         </p:nvSpPr>
         <p:spPr>
           <a:xfrm>
-            <a:off x="1280160" y="1097280"/>
-            <a:ext cx="10058400" cy="4663440"/>
+            <a:off x="1234440" y="1005840"/>
+            <a:ext cx="10241280" cy="4846320"/>
           </a:xfrm>
           <a:prstGeom prst="rect">
             <a:avLst/>
@@ -3200,70 +3244,165 @@
           <a:p>
             <a:pPr>
               <a:spcAft>
+                <a:spcPts val="1000"/>
+              </a:spcAft>
+              <a:defRPr b="1" sz="1300">
+                <a:solidFill>
+                  <a:srgbClr val="D97706"/>
+                </a:solidFill>
+              </a:defRPr>
+            </a:pPr>
+            <a:r>
+              <a:t>PCCST501 Computer Networks | KTU 2024 Scheme • MODULE 2 • M2.1.1</a:t>
+            </a:r>
+          </a:p>
+          <a:p>
+            <a:pPr>
+              <a:spcAft>
                 <a:spcPts val="1200"/>
               </a:spcAft>
-              <a:defRPr b="1" sz="1300">
-                <a:solidFill>
-                  <a:srgbClr val="D97706"/>
+              <a:defRPr b="1" sz="3000">
+                <a:solidFill>
+                  <a:srgbClr val="F8FAFC"/>
                 </a:solidFill>
               </a:defRPr>
             </a:pPr>
             <a:r>
-              <a:t>PCCST501 Computer Networks | KTU 2024 Scheme • MODULE 2 • M2.1.1</a:t>
+              <a:t>Transport Layer Services &amp; Multiplexing Principles</a:t>
             </a:r>
           </a:p>
           <a:p>
             <a:pPr>
               <a:spcAft>
-                <a:spcPts val="1400"/>
+                <a:spcPts val="2400"/>
               </a:spcAft>
-              <a:defRPr b="1" sz="3200">
-                <a:solidFill>
-                  <a:srgbClr val="F8FAFC"/>
+              <a:defRPr sz="1600">
+                <a:solidFill>
+                  <a:srgbClr val="94A3B8"/>
                 </a:solidFill>
               </a:defRPr>
             </a:pPr>
             <a:r>
-              <a:t>Transport Layer Services &amp; Principles</a:t>
+              <a:t>Process-to-Process Communication, Port Addressing, Connectionless vs Connection-Oriented Demultiplexing (2-Tuple vs 4-Tuple)</a:t>
             </a:r>
           </a:p>
           <a:p>
             <a:pPr>
               <a:spcAft>
-                <a:spcPts val="2800"/>
+                <a:spcPts val="300"/>
               </a:spcAft>
-              <a:defRPr sz="1700">
+              <a:defRPr b="1" sz="1350">
+                <a:solidFill>
+                  <a:srgbClr val="E2E8F0"/>
+                </a:solidFill>
+              </a:defRPr>
+            </a:pPr>
+            <a:r>
+              <a:t>Prepared by: Prof. Anju Markose | Assistant Professor, Dept. of CSE | VJCET</a:t>
+            </a:r>
+          </a:p>
+          <a:p>
+            <a:pPr>
+              <a:defRPr sz="1150">
                 <a:solidFill>
                   <a:srgbClr val="94A3B8"/>
                 </a:solidFill>
               </a:defRPr>
             </a:pPr>
             <a:r>
-              <a:t>Process-to-Process Logical Communication, Port Addressing Hierarchy, Multiplexing &amp; Demultiplexing</a:t>
-            </a:r>
-          </a:p>
+              <a:t>Viswajyothi College of Engineering and Technology (VJCET), Vazhakulam • KTU S5 CSE</a:t>
+            </a:r>
+          </a:p>
+        </p:txBody>
+      </p:sp>
+      <p:sp>
+        <p:nvSpPr>
+          <p:cNvPr id="6" name="Rounded Rectangle 5"/>
+          <p:cNvSpPr/>
+          <p:nvPr/>
+        </p:nvSpPr>
+        <p:spPr>
+          <a:xfrm>
+            <a:off x="8412480" y="5120640"/>
+            <a:ext cx="3017520" cy="822960"/>
+          </a:xfrm>
+          <a:prstGeom prst="roundRect">
+            <a:avLst/>
+          </a:prstGeom>
+          <a:solidFill>
+            <a:srgbClr val="1E293B"/>
+          </a:solidFill>
+          <a:ln w="12700">
+            <a:solidFill>
+              <a:srgbClr val="0E7490"/>
+            </a:solidFill>
+          </a:ln>
+        </p:spPr>
+        <p:style>
+          <a:lnRef idx="1">
+            <a:schemeClr val="accent1"/>
+          </a:lnRef>
+          <a:fillRef idx="3">
+            <a:schemeClr val="accent1"/>
+          </a:fillRef>
+          <a:effectRef idx="2">
+            <a:schemeClr val="accent1"/>
+          </a:effectRef>
+          <a:fontRef idx="minor">
+            <a:schemeClr val="lt1"/>
+          </a:fontRef>
+        </p:style>
+        <p:txBody>
+          <a:bodyPr rtlCol="0" anchor="ctr"/>
+          <a:lstStyle/>
+          <a:p>
+            <a:pPr algn="ctr"/>
+          </a:p>
+        </p:txBody>
+      </p:sp>
+      <p:sp>
+        <p:nvSpPr>
+          <p:cNvPr id="7" name="TextBox 6"/>
+          <p:cNvSpPr txBox="1"/>
+          <p:nvPr/>
+        </p:nvSpPr>
+        <p:spPr>
+          <a:xfrm>
+            <a:off x="8503920" y="5166360"/>
+            <a:ext cx="2834640" cy="731520"/>
+          </a:xfrm>
+          <a:prstGeom prst="rect">
+            <a:avLst/>
+          </a:prstGeom>
+          <a:noFill/>
+        </p:spPr>
+        <p:txBody>
+          <a:bodyPr wrap="none">
+            <a:spAutoFit/>
+          </a:bodyPr>
+          <a:lstStyle/>
           <a:p>
             <a:pPr>
-              <a:defRPr b="1" sz="1300">
-                <a:solidFill>
-                  <a:srgbClr val="E2E8F0"/>
+              <a:defRPr b="1" sz="1050">
+                <a:solidFill>
+                  <a:srgbClr val="D97706"/>
                 </a:solidFill>
               </a:defRPr>
             </a:pPr>
             <a:r>
-              <a:t>Prepared by: Prof. Anju Markose | Assistant Professor, Dept. of CSE | VJCET</a:t>
+              <a:t>KTU B.Tech Curriculum</a:t>
             </a:r>
           </a:p>
           <a:p>
             <a:pPr>
-              <a:defRPr sz="1100">
-                <a:solidFill>
-                  <a:srgbClr val="94A3B8"/>
+              <a:defRPr sz="950">
+                <a:solidFill>
+                  <a:srgbClr val="F8FAFC"/>
                 </a:solidFill>
               </a:defRPr>
             </a:pPr>
             <a:r>
-              <a:t>Viswajyothi College of Engineering and Technology (VJCET), Vazhakulam</a:t>
+              <a:t>Official Classroom Slide Deck</a:t>
             </a:r>
           </a:p>
         </p:txBody>
@@ -3395,14 +3534,14 @@
           <a:lstStyle/>
           <a:p>
             <a:pPr>
-              <a:defRPr b="1" sz="2300">
+              <a:defRPr b="1" sz="2200">
                 <a:solidFill>
                   <a:srgbClr val="F8FAFC"/>
                 </a:solidFill>
               </a:defRPr>
             </a:pPr>
             <a:r>
-              <a:t>2.1.1.1 Transport Layer Role &amp; Port Addressing</a:t>
+              <a:t>2.1.1.1 Transport Layer Core Responsibilities</a:t>
             </a:r>
           </a:p>
         </p:txBody>
@@ -3437,7 +3576,7 @@
               </a:defRPr>
             </a:pPr>
             <a:r>
-              <a:t>M2.1.1 TL SERVICES</a:t>
+              <a:t>M2.1.1 TRANSPORT SERVICES</a:t>
             </a:r>
           </a:p>
         </p:txBody>
@@ -3450,7 +3589,7 @@
         </p:nvSpPr>
         <p:spPr>
           <a:xfrm>
-            <a:off x="731520" y="1280160"/>
+            <a:off x="731520" y="1234440"/>
             <a:ext cx="6858000" cy="4937760"/>
           </a:xfrm>
           <a:prstGeom prst="rect">
@@ -3468,29 +3607,29 @@
               <a:spcAft>
                 <a:spcPts val="200"/>
               </a:spcAft>
-              <a:defRPr b="1" sz="1500">
+              <a:defRPr b="1" sz="1450">
                 <a:solidFill>
                   <a:srgbClr val="0F1E4A"/>
                 </a:solidFill>
               </a:defRPr>
             </a:pPr>
             <a:r>
-              <a:t>• Process-to-Process Delivery</a:t>
+              <a:t>• Process-to-Process Logical Delivery</a:t>
             </a:r>
           </a:p>
           <a:p>
             <a:pPr>
               <a:spcAft>
-                <a:spcPts val="800"/>
+                <a:spcPts val="700"/>
               </a:spcAft>
-              <a:defRPr sz="1300">
-                <a:solidFill>
-                  <a:srgbClr val="1E293B"/>
+              <a:defRPr sz="1250">
+                <a:solidFill>
+                  <a:srgbClr val="0F172A"/>
                 </a:solidFill>
               </a:defRPr>
             </a:pPr>
             <a:r>
-              <a:t>   While the Network Layer provides host-to-host delivery between IP addresses, the Transport Layer provides logical communication between application processes running on those hosts.</a:t>
+              <a:t>   While the Network Layer delivers packets host-to-host between IP addresses, the Transport Layer extends this to deliver messages process-to-process between application sockets.</a:t>
             </a:r>
           </a:p>
           <a:p>
@@ -3498,29 +3637,29 @@
               <a:spcAft>
                 <a:spcPts val="200"/>
               </a:spcAft>
-              <a:defRPr b="1" sz="1500">
+              <a:defRPr b="1" sz="1450">
                 <a:solidFill>
                   <a:srgbClr val="0F1E4A"/>
                 </a:solidFill>
               </a:defRPr>
             </a:pPr>
             <a:r>
-              <a:t>• 16-Bit Port Numbers (0 to 65535)</a:t>
+              <a:t>• Port Addressing &amp; Socket Binding</a:t>
             </a:r>
           </a:p>
           <a:p>
             <a:pPr>
               <a:spcAft>
-                <a:spcPts val="800"/>
+                <a:spcPts val="700"/>
               </a:spcAft>
-              <a:defRPr sz="1300">
-                <a:solidFill>
-                  <a:srgbClr val="1E293B"/>
+              <a:defRPr sz="1250">
+                <a:solidFill>
+                  <a:srgbClr val="0F172A"/>
                 </a:solidFill>
               </a:defRPr>
             </a:pPr>
             <a:r>
-              <a:t>   Used to identify specific application processes running on an operating system.</a:t>
+              <a:t>   Processes are identified via 16-bit Port Numbers (0 to 65,535). Sockets bind an IP address and Port number together as an end-to-end communication endpoint.</a:t>
             </a:r>
           </a:p>
           <a:p>
@@ -3528,29 +3667,29 @@
               <a:spcAft>
                 <a:spcPts val="200"/>
               </a:spcAft>
-              <a:defRPr b="1" sz="1500">
+              <a:defRPr b="1" sz="1450">
                 <a:solidFill>
                   <a:srgbClr val="0F1E4A"/>
                 </a:solidFill>
               </a:defRPr>
             </a:pPr>
             <a:r>
-              <a:t>• Well-Known Ports (0 - 1023)</a:t>
+              <a:t>• Transport Layer Responsibilities</a:t>
             </a:r>
           </a:p>
           <a:p>
             <a:pPr>
               <a:spcAft>
-                <a:spcPts val="800"/>
+                <a:spcPts val="700"/>
               </a:spcAft>
-              <a:defRPr sz="1300">
-                <a:solidFill>
-                  <a:srgbClr val="1E293B"/>
+              <a:defRPr sz="1250">
+                <a:solidFill>
+                  <a:srgbClr val="0F172A"/>
                 </a:solidFill>
               </a:defRPr>
             </a:pPr>
             <a:r>
-              <a:t>   Assigned by IANA for standard server services (e.g., HTTP: 80, HTTPS: 443, FTP: 21, SSH: 22, DNS: 53, SMTP: 25). Requires root/admin privilege to bind.</a:t>
+              <a:t>   1. Multiplexing &amp; Demultiplexing, 2. Reliability (Loss detection, ACKs, retransmissions), 3. Flow Control (Preventing receiver buffer overflow), 4. Congestion Control (Preventing network core collapse).</a:t>
             </a:r>
           </a:p>
           <a:p>
@@ -3558,59 +3697,29 @@
               <a:spcAft>
                 <a:spcPts val="200"/>
               </a:spcAft>
-              <a:defRPr b="1" sz="1500">
+              <a:defRPr b="1" sz="1450">
                 <a:solidFill>
                   <a:srgbClr val="0F1E4A"/>
                 </a:solidFill>
               </a:defRPr>
             </a:pPr>
             <a:r>
-              <a:t>• Registered Ports (1024 - 49151)</a:t>
+              <a:t>• Transport Limitations</a:t>
             </a:r>
           </a:p>
           <a:p>
             <a:pPr>
               <a:spcAft>
-                <a:spcPts val="800"/>
+                <a:spcPts val="700"/>
               </a:spcAft>
-              <a:defRPr sz="1300">
-                <a:solidFill>
-                  <a:srgbClr val="1E293B"/>
+              <a:defRPr sz="1250">
+                <a:solidFill>
+                  <a:srgbClr val="0F172A"/>
                 </a:solidFill>
               </a:defRPr>
             </a:pPr>
             <a:r>
-              <a:t>   Used by vendor applications (e.g. MySQL: 3306, PostgreSQL: 5432, Redis: 6379).</a:t>
-            </a:r>
-          </a:p>
-          <a:p>
-            <a:pPr>
-              <a:spcAft>
-                <a:spcPts val="200"/>
-              </a:spcAft>
-              <a:defRPr b="1" sz="1500">
-                <a:solidFill>
-                  <a:srgbClr val="0F1E4A"/>
-                </a:solidFill>
-              </a:defRPr>
-            </a:pPr>
-            <a:r>
-              <a:t>• Dynamic / Ephemeral Ports (49152 - 65535)</a:t>
-            </a:r>
-          </a:p>
-          <a:p>
-            <a:pPr>
-              <a:spcAft>
-                <a:spcPts val="800"/>
-              </a:spcAft>
-              <a:defRPr sz="1300">
-                <a:solidFill>
-                  <a:srgbClr val="1E293B"/>
-                </a:solidFill>
-              </a:defRPr>
-            </a:pPr>
-            <a:r>
-              <a:t>   Assigned automatically by the client operating system kernel for short-lived client-side connection endpoints.</a:t>
+              <a:t>   Transport protocols cannot provide hard real-time delay bounds or guaranteed bandwidth on standard best-effort IP networks.</a:t>
             </a:r>
           </a:p>
         </p:txBody>
@@ -3623,14 +3732,14 @@
         </p:nvSpPr>
         <p:spPr>
           <a:xfrm>
-            <a:off x="7955279" y="1280160"/>
-            <a:ext cx="3566160" cy="4846320"/>
+            <a:off x="7955279" y="1234440"/>
+            <a:ext cx="3566160" cy="4892040"/>
           </a:xfrm>
           <a:prstGeom prst="roundRect">
             <a:avLst/>
           </a:prstGeom>
           <a:solidFill>
-            <a:srgbClr val="F1F5F9"/>
+            <a:srgbClr val="F8FAFC"/>
           </a:solidFill>
           <a:ln w="19050">
             <a:solidFill>
@@ -3668,7 +3777,7 @@
         </p:nvSpPr>
         <p:spPr>
           <a:xfrm>
-            <a:off x="8138160" y="1417320"/>
+            <a:off x="8138160" y="1371600"/>
             <a:ext cx="3200400" cy="4572000"/>
           </a:xfrm>
           <a:prstGeom prst="rect">
@@ -3693,7 +3802,7 @@
               </a:defRPr>
             </a:pPr>
             <a:r>
-              <a:t>Port Ranges</a:t>
+              <a:t>Key Port Numbers</a:t>
             </a:r>
           </a:p>
           <a:p>
@@ -3703,12 +3812,12 @@
               </a:spcAft>
               <a:defRPr sz="1200">
                 <a:solidFill>
-                  <a:srgbClr val="1E293B"/>
+                  <a:srgbClr val="0F172A"/>
                 </a:solidFill>
               </a:defRPr>
             </a:pPr>
             <a:r>
-              <a:t>→ Well-Known: 0 to 1023</a:t>
+              <a:t>→ Port 80: HTTP</a:t>
             </a:r>
           </a:p>
           <a:p>
@@ -3718,12 +3827,12 @@
               </a:spcAft>
               <a:defRPr sz="1200">
                 <a:solidFill>
-                  <a:srgbClr val="1E293B"/>
+                  <a:srgbClr val="0F172A"/>
                 </a:solidFill>
               </a:defRPr>
             </a:pPr>
             <a:r>
-              <a:t>→ Registered: 1024 to 49151</a:t>
+              <a:t>→ Port 443: HTTPS</a:t>
             </a:r>
           </a:p>
           <a:p>
@@ -3733,12 +3842,12 @@
               </a:spcAft>
               <a:defRPr sz="1200">
                 <a:solidFill>
-                  <a:srgbClr val="1E293B"/>
+                  <a:srgbClr val="0F172A"/>
                 </a:solidFill>
               </a:defRPr>
             </a:pPr>
             <a:r>
-              <a:t>→ Dynamic/Private: 49152 to 65535</a:t>
+              <a:t>→ Port 22: SSH</a:t>
             </a:r>
           </a:p>
           <a:p>
@@ -3748,12 +3857,42 @@
               </a:spcAft>
               <a:defRPr sz="1200">
                 <a:solidFill>
-                  <a:srgbClr val="1E293B"/>
+                  <a:srgbClr val="0F172A"/>
                 </a:solidFill>
               </a:defRPr>
             </a:pPr>
             <a:r>
-              <a:t>→ Socket = IP Address + Port Number</a:t>
+              <a:t>→ Port 53: DNS</a:t>
+            </a:r>
+          </a:p>
+          <a:p>
+            <a:pPr>
+              <a:spcAft>
+                <a:spcPts val="600"/>
+              </a:spcAft>
+              <a:defRPr sz="1200">
+                <a:solidFill>
+                  <a:srgbClr val="0F172A"/>
+                </a:solidFill>
+              </a:defRPr>
+            </a:pPr>
+            <a:r>
+              <a:t>→ Port 25: SMTP</a:t>
+            </a:r>
+          </a:p>
+          <a:p>
+            <a:pPr>
+              <a:spcAft>
+                <a:spcPts val="600"/>
+              </a:spcAft>
+              <a:defRPr sz="1200">
+                <a:solidFill>
+                  <a:srgbClr val="0F172A"/>
+                </a:solidFill>
+              </a:defRPr>
+            </a:pPr>
+            <a:r>
+              <a:t>→ Port 21: FTP Control</a:t>
             </a:r>
           </a:p>
         </p:txBody>
@@ -3766,8 +3905,8 @@
         </p:nvSpPr>
         <p:spPr>
           <a:xfrm>
-            <a:off x="731520" y="6309360"/>
-            <a:ext cx="10789920" cy="365760"/>
+            <a:off x="731520" y="6327648"/>
+            <a:ext cx="10789920" cy="320040"/>
           </a:xfrm>
           <a:prstGeom prst="rect">
             <a:avLst/>
@@ -3789,6 +3928,41 @@
             </a:pPr>
             <a:r>
               <a:t>PCCST501 Computer Networks | KTU 2024 Scheme | Prof. Anju Markose | Assistant Professor, Dept. of CSE | VJCET</a:t>
+            </a:r>
+          </a:p>
+        </p:txBody>
+      </p:sp>
+      <p:sp>
+        <p:nvSpPr>
+          <p:cNvPr id="10" name="TextBox 9"/>
+          <p:cNvSpPr txBox="1"/>
+          <p:nvPr/>
+        </p:nvSpPr>
+        <p:spPr>
+          <a:xfrm>
+            <a:off x="6858000" y="6327648"/>
+            <a:ext cx="4572000" cy="320040"/>
+          </a:xfrm>
+          <a:prstGeom prst="rect">
+            <a:avLst/>
+          </a:prstGeom>
+          <a:noFill/>
+        </p:spPr>
+        <p:txBody>
+          <a:bodyPr wrap="none">
+            <a:spAutoFit/>
+          </a:bodyPr>
+          <a:lstStyle/>
+          <a:p>
+            <a:pPr algn="r">
+              <a:defRPr sz="950">
+                <a:solidFill>
+                  <a:srgbClr val="64748B"/>
+                </a:solidFill>
+              </a:defRPr>
+            </a:pPr>
+            <a:r>
+              <a:t>Dept. of CSE, VJCET</a:t>
             </a:r>
           </a:p>
         </p:txBody>
@@ -3920,14 +4094,14 @@
           <a:lstStyle/>
           <a:p>
             <a:pPr>
-              <a:defRPr b="1" sz="2300">
+              <a:defRPr b="1" sz="2200">
                 <a:solidFill>
                   <a:srgbClr val="F8FAFC"/>
                 </a:solidFill>
               </a:defRPr>
             </a:pPr>
             <a:r>
-              <a:t>2.1.1.2 Multiplexing &amp; Demultiplexing Mechanisms</a:t>
+              <a:t>2.1.1.2 Demultiplexing: Connectionless (UDP) vs Connection-Oriented (TCP)</a:t>
             </a:r>
           </a:p>
         </p:txBody>
@@ -3962,7 +4136,7 @@
               </a:defRPr>
             </a:pPr>
             <a:r>
-              <a:t>M2.1.1 MUX &amp; DEMUX</a:t>
+              <a:t>M2.1.1 DEMULTIPLEXING</a:t>
             </a:r>
           </a:p>
         </p:txBody>
@@ -3975,18 +4149,18 @@
         </p:nvSpPr>
         <p:spPr>
           <a:xfrm>
-            <a:off x="731520" y="1280160"/>
-            <a:ext cx="5212080" cy="4846320"/>
+            <a:off x="731520" y="1234440"/>
+            <a:ext cx="5212080" cy="4892040"/>
           </a:xfrm>
           <a:prstGeom prst="roundRect">
             <a:avLst/>
           </a:prstGeom>
           <a:solidFill>
-            <a:srgbClr val="F1F5F9"/>
+            <a:srgbClr val="F8FAFC"/>
           </a:solidFill>
           <a:ln w="19050">
             <a:solidFill>
-              <a:srgbClr val="0E7490"/>
+              <a:srgbClr val="0F1E4A"/>
             </a:solidFill>
           </a:ln>
         </p:spPr>
@@ -4020,7 +4194,7 @@
         </p:nvSpPr>
         <p:spPr>
           <a:xfrm>
-            <a:off x="914400" y="1417320"/>
+            <a:off x="914400" y="1371600"/>
             <a:ext cx="4846320" cy="4572000"/>
           </a:xfrm>
           <a:prstGeom prst="rect">
@@ -4036,76 +4210,76 @@
           <a:p>
             <a:pPr>
               <a:spcAft>
-                <a:spcPts val="1200"/>
+                <a:spcPts val="1000"/>
               </a:spcAft>
-              <a:defRPr b="1" sz="1600">
+              <a:defRPr b="1" sz="1550">
                 <a:solidFill>
                   <a:srgbClr val="0F1E4A"/>
                 </a:solidFill>
               </a:defRPr>
             </a:pPr>
             <a:r>
-              <a:t>Connectionless Demux (UDP)</a:t>
+              <a:t>UDP Demultiplexing (2-Tuple)</a:t>
             </a:r>
           </a:p>
           <a:p>
             <a:pPr>
               <a:spcAft>
-                <a:spcPts val="600"/>
+                <a:spcPts val="500"/>
               </a:spcAft>
-              <a:defRPr sz="1250">
-                <a:solidFill>
-                  <a:srgbClr val="1E293B"/>
+              <a:defRPr sz="1200">
+                <a:solidFill>
+                  <a:srgbClr val="0F172A"/>
                 </a:solidFill>
               </a:defRPr>
             </a:pPr>
             <a:r>
-              <a:t>• Identifier: 2-Tuple: `(Destination IP, Destination Port)`</a:t>
+              <a:t>• Identifier Tuple: Identified strictly by: `(Destination IP, Destination Port)`</a:t>
             </a:r>
           </a:p>
           <a:p>
             <a:pPr>
               <a:spcAft>
-                <a:spcPts val="600"/>
+                <a:spcPts val="500"/>
               </a:spcAft>
-              <a:defRPr sz="1250">
-                <a:solidFill>
-                  <a:srgbClr val="1E293B"/>
+              <a:defRPr sz="1200">
+                <a:solidFill>
+                  <a:srgbClr val="0F172A"/>
                 </a:solidFill>
               </a:defRPr>
             </a:pPr>
             <a:r>
-              <a:t>• Behavior: Packets from different source IPs/Ports targeting the same Dest IP/Port go to the SAME socket</a:t>
+              <a:t>• Behavior: Two UDP datagrams arriving from different source IP/ports targeted at same Dest Port are delivered to the exact same socket</a:t>
             </a:r>
           </a:p>
           <a:p>
             <a:pPr>
               <a:spcAft>
-                <a:spcPts val="600"/>
+                <a:spcPts val="500"/>
               </a:spcAft>
-              <a:defRPr sz="1250">
-                <a:solidFill>
-                  <a:srgbClr val="1E293B"/>
+              <a:defRPr sz="1200">
+                <a:solidFill>
+                  <a:srgbClr val="0F172A"/>
                 </a:solidFill>
               </a:defRPr>
             </a:pPr>
             <a:r>
-              <a:t>• Overhead: Lightweight, zero connection state maintained by kernel</a:t>
+              <a:t>• State: Completely stateless; no connection handshake or per-peer buffers</a:t>
             </a:r>
           </a:p>
           <a:p>
             <a:pPr>
               <a:spcAft>
-                <a:spcPts val="600"/>
+                <a:spcPts val="500"/>
               </a:spcAft>
-              <a:defRPr sz="1250">
-                <a:solidFill>
-                  <a:srgbClr val="1E293B"/>
+              <a:defRPr sz="1200">
+                <a:solidFill>
+                  <a:srgbClr val="0F172A"/>
                 </a:solidFill>
               </a:defRPr>
             </a:pPr>
             <a:r>
-              <a:t>• Use Case: DNS queries, SNMP traps, video broadcasting</a:t>
+              <a:t>• Speed: Zero connection establishment latency</a:t>
             </a:r>
           </a:p>
         </p:txBody>
@@ -4118,8 +4292,8 @@
         </p:nvSpPr>
         <p:spPr>
           <a:xfrm>
-            <a:off x="6309360" y="1280160"/>
-            <a:ext cx="5212080" cy="4846320"/>
+            <a:off x="6309360" y="1234440"/>
+            <a:ext cx="5212080" cy="4892040"/>
           </a:xfrm>
           <a:prstGeom prst="roundRect">
             <a:avLst/>
@@ -4129,7 +4303,7 @@
           </a:solidFill>
           <a:ln w="19050">
             <a:solidFill>
-              <a:srgbClr val="0F1E4A"/>
+              <a:srgbClr val="0E7490"/>
             </a:solidFill>
           </a:ln>
         </p:spPr>
@@ -4163,7 +4337,7 @@
         </p:nvSpPr>
         <p:spPr>
           <a:xfrm>
-            <a:off x="6492240" y="1417320"/>
+            <a:off x="6492240" y="1371600"/>
             <a:ext cx="4846320" cy="4572000"/>
           </a:xfrm>
           <a:prstGeom prst="rect">
@@ -4179,16 +4353,516 @@
           <a:p>
             <a:pPr>
               <a:spcAft>
-                <a:spcPts val="1200"/>
+                <a:spcPts val="1000"/>
               </a:spcAft>
-              <a:defRPr b="1" sz="1600">
+              <a:defRPr b="1" sz="1550">
                 <a:solidFill>
                   <a:srgbClr val="0E7490"/>
                 </a:solidFill>
               </a:defRPr>
             </a:pPr>
             <a:r>
-              <a:t>Connection-Oriented Demux (TCP)</a:t>
+              <a:t>TCP Demultiplexing (4-Tuple)</a:t>
+            </a:r>
+          </a:p>
+          <a:p>
+            <a:pPr>
+              <a:spcAft>
+                <a:spcPts val="500"/>
+              </a:spcAft>
+              <a:defRPr sz="1200">
+                <a:solidFill>
+                  <a:srgbClr val="0F172A"/>
+                </a:solidFill>
+              </a:defRPr>
+            </a:pPr>
+            <a:r>
+              <a:t>• Identifier Tuple: Identified by 4-tuple: `(Source IP, Source Port, Destination IP, Destination Port)`</a:t>
+            </a:r>
+          </a:p>
+          <a:p>
+            <a:pPr>
+              <a:spcAft>
+                <a:spcPts val="500"/>
+              </a:spcAft>
+              <a:defRPr sz="1200">
+                <a:solidFill>
+                  <a:srgbClr val="0F172A"/>
+                </a:solidFill>
+              </a:defRPr>
+            </a:pPr>
+            <a:r>
+              <a:t>• Behavior: Server listening socket (`listen()`) forks/spawns a distinct connected socket (`accept()`) for each unique client 4-tuple</a:t>
+            </a:r>
+          </a:p>
+          <a:p>
+            <a:pPr>
+              <a:spcAft>
+                <a:spcPts val="500"/>
+              </a:spcAft>
+              <a:defRPr sz="1200">
+                <a:solidFill>
+                  <a:srgbClr val="0F172A"/>
+                </a:solidFill>
+              </a:defRPr>
+            </a:pPr>
+            <a:r>
+              <a:t>• State: Full connection state, sequence tracking, and dedicated receive buffers per connection</a:t>
+            </a:r>
+          </a:p>
+          <a:p>
+            <a:pPr>
+              <a:spcAft>
+                <a:spcPts val="500"/>
+              </a:spcAft>
+              <a:defRPr sz="1200">
+                <a:solidFill>
+                  <a:srgbClr val="0F172A"/>
+                </a:solidFill>
+              </a:defRPr>
+            </a:pPr>
+            <a:r>
+              <a:t>• Scalability: Enables concurrent multi-client web/database servers</a:t>
+            </a:r>
+          </a:p>
+        </p:txBody>
+      </p:sp>
+      <p:sp>
+        <p:nvSpPr>
+          <p:cNvPr id="10" name="TextBox 9"/>
+          <p:cNvSpPr txBox="1"/>
+          <p:nvPr/>
+        </p:nvSpPr>
+        <p:spPr>
+          <a:xfrm>
+            <a:off x="731520" y="6327648"/>
+            <a:ext cx="10789920" cy="320040"/>
+          </a:xfrm>
+          <a:prstGeom prst="rect">
+            <a:avLst/>
+          </a:prstGeom>
+          <a:noFill/>
+        </p:spPr>
+        <p:txBody>
+          <a:bodyPr wrap="none">
+            <a:spAutoFit/>
+          </a:bodyPr>
+          <a:lstStyle/>
+          <a:p>
+            <a:pPr>
+              <a:defRPr sz="950">
+                <a:solidFill>
+                  <a:srgbClr val="64748B"/>
+                </a:solidFill>
+              </a:defRPr>
+            </a:pPr>
+            <a:r>
+              <a:t>PCCST501 Computer Networks | KTU 2024 Scheme | Prof. Anju Markose | Assistant Professor, Dept. of CSE | VJCET</a:t>
+            </a:r>
+          </a:p>
+        </p:txBody>
+      </p:sp>
+      <p:sp>
+        <p:nvSpPr>
+          <p:cNvPr id="11" name="TextBox 10"/>
+          <p:cNvSpPr txBox="1"/>
+          <p:nvPr/>
+        </p:nvSpPr>
+        <p:spPr>
+          <a:xfrm>
+            <a:off x="6858000" y="6327648"/>
+            <a:ext cx="4572000" cy="320040"/>
+          </a:xfrm>
+          <a:prstGeom prst="rect">
+            <a:avLst/>
+          </a:prstGeom>
+          <a:noFill/>
+        </p:spPr>
+        <p:txBody>
+          <a:bodyPr wrap="none">
+            <a:spAutoFit/>
+          </a:bodyPr>
+          <a:lstStyle/>
+          <a:p>
+            <a:pPr algn="r">
+              <a:defRPr sz="950">
+                <a:solidFill>
+                  <a:srgbClr val="64748B"/>
+                </a:solidFill>
+              </a:defRPr>
+            </a:pPr>
+            <a:r>
+              <a:t>Dept. of CSE, VJCET</a:t>
+            </a:r>
+          </a:p>
+        </p:txBody>
+      </p:sp>
+    </p:spTree>
+  </p:cSld>
+  <p:clrMapOvr>
+    <a:masterClrMapping/>
+  </p:clrMapOvr>
+</p:sld>
+</file>
+
+<file path=ppt/slides/slide4.xml><?xml version="1.0" encoding="utf-8"?>
+<p:sld xmlns:a="http://schemas.openxmlformats.org/drawingml/2006/main" xmlns:p="http://schemas.openxmlformats.org/presentationml/2006/main" xmlns:r="http://schemas.openxmlformats.org/officeDocument/2006/relationships">
+  <p:cSld>
+    <p:spTree>
+      <p:nvGrpSpPr>
+        <p:cNvPr id="1" name=""/>
+        <p:cNvGrpSpPr/>
+        <p:nvPr/>
+      </p:nvGrpSpPr>
+      <p:grpSpPr/>
+      <p:sp>
+        <p:nvSpPr>
+          <p:cNvPr id="2" name="Rectangle 1"/>
+          <p:cNvSpPr/>
+          <p:nvPr/>
+        </p:nvSpPr>
+        <p:spPr>
+          <a:xfrm>
+            <a:off x="0" y="0"/>
+            <a:ext cx="12191695" cy="1005840"/>
+          </a:xfrm>
+          <a:prstGeom prst="rect">
+            <a:avLst/>
+          </a:prstGeom>
+          <a:solidFill>
+            <a:srgbClr val="0F1E4A"/>
+          </a:solidFill>
+          <a:ln>
+            <a:noFill/>
+          </a:ln>
+        </p:spPr>
+        <p:style>
+          <a:lnRef idx="1">
+            <a:schemeClr val="accent1"/>
+          </a:lnRef>
+          <a:fillRef idx="3">
+            <a:schemeClr val="accent1"/>
+          </a:fillRef>
+          <a:effectRef idx="2">
+            <a:schemeClr val="accent1"/>
+          </a:effectRef>
+          <a:fontRef idx="minor">
+            <a:schemeClr val="lt1"/>
+          </a:fontRef>
+        </p:style>
+        <p:txBody>
+          <a:bodyPr rtlCol="0" anchor="ctr"/>
+          <a:lstStyle/>
+          <a:p>
+            <a:pPr algn="ctr"/>
+          </a:p>
+        </p:txBody>
+      </p:sp>
+      <p:sp>
+        <p:nvSpPr>
+          <p:cNvPr id="3" name="Rectangle 2"/>
+          <p:cNvSpPr/>
+          <p:nvPr/>
+        </p:nvSpPr>
+        <p:spPr>
+          <a:xfrm>
+            <a:off x="0" y="969264"/>
+            <a:ext cx="12191695" cy="36576"/>
+          </a:xfrm>
+          <a:prstGeom prst="rect">
+            <a:avLst/>
+          </a:prstGeom>
+          <a:solidFill>
+            <a:srgbClr val="D97706"/>
+          </a:solidFill>
+          <a:ln>
+            <a:noFill/>
+          </a:ln>
+        </p:spPr>
+        <p:style>
+          <a:lnRef idx="1">
+            <a:schemeClr val="accent1"/>
+          </a:lnRef>
+          <a:fillRef idx="3">
+            <a:schemeClr val="accent1"/>
+          </a:fillRef>
+          <a:effectRef idx="2">
+            <a:schemeClr val="accent1"/>
+          </a:effectRef>
+          <a:fontRef idx="minor">
+            <a:schemeClr val="lt1"/>
+          </a:fontRef>
+        </p:style>
+        <p:txBody>
+          <a:bodyPr rtlCol="0" anchor="ctr"/>
+          <a:lstStyle/>
+          <a:p>
+            <a:pPr algn="ctr"/>
+          </a:p>
+        </p:txBody>
+      </p:sp>
+      <p:sp>
+        <p:nvSpPr>
+          <p:cNvPr id="4" name="TextBox 3"/>
+          <p:cNvSpPr txBox="1"/>
+          <p:nvPr/>
+        </p:nvSpPr>
+        <p:spPr>
+          <a:xfrm>
+            <a:off x="731520" y="164592"/>
+            <a:ext cx="8412480" cy="685800"/>
+          </a:xfrm>
+          <a:prstGeom prst="rect">
+            <a:avLst/>
+          </a:prstGeom>
+          <a:noFill/>
+        </p:spPr>
+        <p:txBody>
+          <a:bodyPr wrap="none">
+            <a:spAutoFit/>
+          </a:bodyPr>
+          <a:lstStyle/>
+          <a:p>
+            <a:pPr>
+              <a:defRPr b="1" sz="2100">
+                <a:solidFill>
+                  <a:srgbClr val="F8FAFC"/>
+                </a:solidFill>
+              </a:defRPr>
+            </a:pPr>
+            <a:r>
+              <a:t>🎯 Exam Booster &amp; Review: Transport Layer Services</a:t>
+            </a:r>
+          </a:p>
+        </p:txBody>
+      </p:sp>
+      <p:sp>
+        <p:nvSpPr>
+          <p:cNvPr id="5" name="TextBox 4"/>
+          <p:cNvSpPr txBox="1"/>
+          <p:nvPr/>
+        </p:nvSpPr>
+        <p:spPr>
+          <a:xfrm>
+            <a:off x="8229600" y="164592"/>
+            <a:ext cx="3291840" cy="685800"/>
+          </a:xfrm>
+          <a:prstGeom prst="rect">
+            <a:avLst/>
+          </a:prstGeom>
+          <a:noFill/>
+        </p:spPr>
+        <p:txBody>
+          <a:bodyPr wrap="none">
+            <a:spAutoFit/>
+          </a:bodyPr>
+          <a:lstStyle/>
+          <a:p>
+            <a:pPr algn="r">
+              <a:defRPr b="1" sz="1300">
+                <a:solidFill>
+                  <a:srgbClr val="D97706"/>
+                </a:solidFill>
+              </a:defRPr>
+            </a:pPr>
+            <a:r>
+              <a:t>M2.1.1</a:t>
+            </a:r>
+          </a:p>
+        </p:txBody>
+      </p:sp>
+      <p:sp>
+        <p:nvSpPr>
+          <p:cNvPr id="6" name="Rounded Rectangle 5"/>
+          <p:cNvSpPr/>
+          <p:nvPr/>
+        </p:nvSpPr>
+        <p:spPr>
+          <a:xfrm>
+            <a:off x="731520" y="1234440"/>
+            <a:ext cx="5303520" cy="4892040"/>
+          </a:xfrm>
+          <a:prstGeom prst="roundRect">
+            <a:avLst/>
+          </a:prstGeom>
+          <a:solidFill>
+            <a:srgbClr val="FEF3C7"/>
+          </a:solidFill>
+          <a:ln w="19050">
+            <a:solidFill>
+              <a:srgbClr val="D97706"/>
+            </a:solidFill>
+          </a:ln>
+        </p:spPr>
+        <p:style>
+          <a:lnRef idx="1">
+            <a:schemeClr val="accent1"/>
+          </a:lnRef>
+          <a:fillRef idx="3">
+            <a:schemeClr val="accent1"/>
+          </a:fillRef>
+          <a:effectRef idx="2">
+            <a:schemeClr val="accent1"/>
+          </a:effectRef>
+          <a:fontRef idx="minor">
+            <a:schemeClr val="lt1"/>
+          </a:fontRef>
+        </p:style>
+        <p:txBody>
+          <a:bodyPr rtlCol="0" anchor="ctr"/>
+          <a:lstStyle/>
+          <a:p>
+            <a:pPr algn="ctr"/>
+          </a:p>
+        </p:txBody>
+      </p:sp>
+      <p:sp>
+        <p:nvSpPr>
+          <p:cNvPr id="7" name="TextBox 6"/>
+          <p:cNvSpPr txBox="1"/>
+          <p:nvPr/>
+        </p:nvSpPr>
+        <p:spPr>
+          <a:xfrm>
+            <a:off x="914400" y="1371600"/>
+            <a:ext cx="4937760" cy="4572000"/>
+          </a:xfrm>
+          <a:prstGeom prst="rect">
+            <a:avLst/>
+          </a:prstGeom>
+          <a:noFill/>
+        </p:spPr>
+        <p:txBody>
+          <a:bodyPr wrap="square">
+            <a:spAutoFit/>
+          </a:bodyPr>
+          <a:lstStyle/>
+          <a:p>
+            <a:pPr>
+              <a:spcAft>
+                <a:spcPts val="1000"/>
+              </a:spcAft>
+              <a:defRPr b="1" sz="1450">
+                <a:solidFill>
+                  <a:srgbClr val="D97706"/>
+                </a:solidFill>
+              </a:defRPr>
+            </a:pPr>
+            <a:r>
+              <a:t>📚 KTU High-Yield Questions (K2 Understand)</a:t>
+            </a:r>
+          </a:p>
+          <a:p>
+            <a:pPr>
+              <a:spcAft>
+                <a:spcPts val="700"/>
+              </a:spcAft>
+              <a:defRPr sz="1200">
+                <a:solidFill>
+                  <a:srgbClr val="0F172A"/>
+                </a:solidFill>
+              </a:defRPr>
+            </a:pPr>
+            <a:r>
+              <a:t>Q: Differentiate between host-to-host delivery and process-to-process delivery with a neat diagram. (6 Marks)</a:t>
+            </a:r>
+          </a:p>
+          <a:p>
+            <a:pPr>
+              <a:spcAft>
+                <a:spcPts val="700"/>
+              </a:spcAft>
+              <a:defRPr sz="1200">
+                <a:solidFill>
+                  <a:srgbClr val="0F172A"/>
+                </a:solidFill>
+              </a:defRPr>
+            </a:pPr>
+            <a:r>
+              <a:t>Q: Explain how multiplexing and demultiplexing work in UDP and TCP. Why does TCP require a 4-tuple while UDP needs only a 2-tuple? (8 Marks)</a:t>
+            </a:r>
+          </a:p>
+        </p:txBody>
+      </p:sp>
+      <p:sp>
+        <p:nvSpPr>
+          <p:cNvPr id="8" name="Rounded Rectangle 7"/>
+          <p:cNvSpPr/>
+          <p:nvPr/>
+        </p:nvSpPr>
+        <p:spPr>
+          <a:xfrm>
+            <a:off x="6309360" y="1234440"/>
+            <a:ext cx="5212080" cy="4892040"/>
+          </a:xfrm>
+          <a:prstGeom prst="roundRect">
+            <a:avLst/>
+          </a:prstGeom>
+          <a:solidFill>
+            <a:srgbClr val="EEF2FF"/>
+          </a:solidFill>
+          <a:ln w="19050">
+            <a:solidFill>
+              <a:srgbClr val="0E7490"/>
+            </a:solidFill>
+          </a:ln>
+        </p:spPr>
+        <p:style>
+          <a:lnRef idx="1">
+            <a:schemeClr val="accent1"/>
+          </a:lnRef>
+          <a:fillRef idx="3">
+            <a:schemeClr val="accent1"/>
+          </a:fillRef>
+          <a:effectRef idx="2">
+            <a:schemeClr val="accent1"/>
+          </a:effectRef>
+          <a:fontRef idx="minor">
+            <a:schemeClr val="lt1"/>
+          </a:fontRef>
+        </p:style>
+        <p:txBody>
+          <a:bodyPr rtlCol="0" anchor="ctr"/>
+          <a:lstStyle/>
+          <a:p>
+            <a:pPr algn="ctr"/>
+          </a:p>
+        </p:txBody>
+      </p:sp>
+      <p:sp>
+        <p:nvSpPr>
+          <p:cNvPr id="9" name="TextBox 8"/>
+          <p:cNvSpPr txBox="1"/>
+          <p:nvPr/>
+        </p:nvSpPr>
+        <p:spPr>
+          <a:xfrm>
+            <a:off x="6492240" y="1371600"/>
+            <a:ext cx="4846320" cy="4572000"/>
+          </a:xfrm>
+          <a:prstGeom prst="rect">
+            <a:avLst/>
+          </a:prstGeom>
+          <a:noFill/>
+        </p:spPr>
+        <p:txBody>
+          <a:bodyPr wrap="square">
+            <a:spAutoFit/>
+          </a:bodyPr>
+          <a:lstStyle/>
+          <a:p>
+            <a:pPr>
+              <a:spcAft>
+                <a:spcPts val="1000"/>
+              </a:spcAft>
+              <a:defRPr b="1" sz="1450">
+                <a:solidFill>
+                  <a:srgbClr val="0E7490"/>
+                </a:solidFill>
+              </a:defRPr>
+            </a:pPr>
+            <a:r>
+              <a:t>💡 Critical Conceptual Takeaways</a:t>
             </a:r>
           </a:p>
           <a:p>
@@ -4196,14 +4870,14 @@
               <a:spcAft>
                 <a:spcPts val="600"/>
               </a:spcAft>
-              <a:defRPr sz="1250">
-                <a:solidFill>
-                  <a:srgbClr val="1E293B"/>
+              <a:defRPr sz="1200">
+                <a:solidFill>
+                  <a:srgbClr val="0F172A"/>
                 </a:solidFill>
               </a:defRPr>
             </a:pPr>
             <a:r>
-              <a:t>• Identifier: 4-Tuple: `(Src IP, Src Port, Dst IP, Dst Port)`</a:t>
+              <a:t>✔ Network layer provides host-to-host IP delivery; Transport layer provides process-to-process port delivery.</a:t>
             </a:r>
           </a:p>
           <a:p>
@@ -4211,14 +4885,14 @@
               <a:spcAft>
                 <a:spcPts val="600"/>
               </a:spcAft>
-              <a:defRPr sz="1250">
-                <a:solidFill>
-                  <a:srgbClr val="1E293B"/>
+              <a:defRPr sz="1200">
+                <a:solidFill>
+                  <a:srgbClr val="0F172A"/>
                 </a:solidFill>
               </a:defRPr>
             </a:pPr>
             <a:r>
-              <a:t>• Behavior: Each concurrent client connection gets a UNIQUE dedicated socket returned by `accept()`</a:t>
+              <a:t>✔ UDP demux uses Destination Port only; TCP demux uses Source IP, Source Port, Dest IP, Dest Port.</a:t>
             </a:r>
           </a:p>
           <a:p>
@@ -4226,29 +4900,14 @@
               <a:spcAft>
                 <a:spcPts val="600"/>
               </a:spcAft>
-              <a:defRPr sz="1250">
-                <a:solidFill>
-                  <a:srgbClr val="1E293B"/>
+              <a:defRPr sz="1200">
+                <a:solidFill>
+                  <a:srgbClr val="0F172A"/>
                 </a:solidFill>
               </a:defRPr>
             </a:pPr>
             <a:r>
-              <a:t>• Overhead: Kernel maintains dedicated buffers &amp; state variables per connection</a:t>
-            </a:r>
-          </a:p>
-          <a:p>
-            <a:pPr>
-              <a:spcAft>
-                <a:spcPts val="600"/>
-              </a:spcAft>
-              <a:defRPr sz="1250">
-                <a:solidFill>
-                  <a:srgbClr val="1E293B"/>
-                </a:solidFill>
-              </a:defRPr>
-            </a:pPr>
-            <a:r>
-              <a:t>• Use Case: Web browsing, secure shell, file transfers</a:t>
+              <a:t>✔ TCP creates separate connected sockets for every distinct client connection.</a:t>
             </a:r>
           </a:p>
         </p:txBody>
@@ -4261,8 +4920,8 @@
         </p:nvSpPr>
         <p:spPr>
           <a:xfrm>
-            <a:off x="731520" y="6309360"/>
-            <a:ext cx="10789920" cy="365760"/>
+            <a:off x="731520" y="6327648"/>
+            <a:ext cx="10789920" cy="320040"/>
           </a:xfrm>
           <a:prstGeom prst="rect">
             <a:avLst/>
@@ -4284,6 +4943,41 @@
             </a:pPr>
             <a:r>
               <a:t>PCCST501 Computer Networks | KTU 2024 Scheme | Prof. Anju Markose | Assistant Professor, Dept. of CSE | VJCET</a:t>
+            </a:r>
+          </a:p>
+        </p:txBody>
+      </p:sp>
+      <p:sp>
+        <p:nvSpPr>
+          <p:cNvPr id="11" name="TextBox 10"/>
+          <p:cNvSpPr txBox="1"/>
+          <p:nvPr/>
+        </p:nvSpPr>
+        <p:spPr>
+          <a:xfrm>
+            <a:off x="6858000" y="6327648"/>
+            <a:ext cx="4572000" cy="320040"/>
+          </a:xfrm>
+          <a:prstGeom prst="rect">
+            <a:avLst/>
+          </a:prstGeom>
+          <a:noFill/>
+        </p:spPr>
+        <p:txBody>
+          <a:bodyPr wrap="none">
+            <a:spAutoFit/>
+          </a:bodyPr>
+          <a:lstStyle/>
+          <a:p>
+            <a:pPr algn="r">
+              <a:defRPr sz="950">
+                <a:solidFill>
+                  <a:srgbClr val="64748B"/>
+                </a:solidFill>
+              </a:defRPr>
+            </a:pPr>
+            <a:r>
+              <a:t>Dept. of CSE, VJCET</a:t>
             </a:r>
           </a:p>
         </p:txBody>
